--- a/Diwali_Sales_report.pptx
+++ b/Diwali_Sales_report.pptx
@@ -118,6 +118,11 @@
       </a:defRPr>
     </a:lvl9pPr>
   </p:defaultTextStyle>
+  <p:extLst>
+    <p:ext uri="{EFAFB233-063F-42B5-8137-9DF3F51BA10A}">
+      <p15:sldGuideLst xmlns:p15="http://schemas.microsoft.com/office/powerpoint/2012/main"/>
+    </p:ext>
+  </p:extLst>
 </p:presentation>
 </file>
 
@@ -5844,7 +5849,7 @@
               </a:lnSpc>
             </a:pPr>
             <a:r>
-              <a:rPr lang="en-US" sz="3400" b="1" u="none" strike="noStrike" dirty="0">
+              <a:rPr lang="en-US" sz="3400" b="1" u="none" strike="noStrike">
                 <a:solidFill>
                   <a:schemeClr val="accent6"/>
                 </a:solidFill>
@@ -6246,6 +6251,38 @@
               <a:uFillTx/>
               <a:latin typeface="Arial"/>
             </a:endParaRPr>
+          </a:p>
+        </p:txBody>
+      </p:sp>
+      <p:sp>
+        <p:nvSpPr>
+          <p:cNvPr id="2" name="TextBox 1">
+            <a:extLst>
+              <a:ext uri="{FF2B5EF4-FFF2-40B4-BE49-F238E27FC236}">
+                <a16:creationId xmlns:a16="http://schemas.microsoft.com/office/drawing/2014/main" id="{084112A6-20A7-6339-7C32-166CD318E95F}"/>
+              </a:ext>
+            </a:extLst>
+          </p:cNvPr>
+          <p:cNvSpPr txBox="1"/>
+          <p:nvPr/>
+        </p:nvSpPr>
+        <p:spPr>
+          <a:xfrm>
+            <a:off x="3805084" y="1524000"/>
+            <a:ext cx="184731" cy="369332"/>
+          </a:xfrm>
+          <a:prstGeom prst="rect">
+            <a:avLst/>
+          </a:prstGeom>
+          <a:noFill/>
+        </p:spPr>
+        <p:txBody>
+          <a:bodyPr wrap="none" rtlCol="0">
+            <a:spAutoFit/>
+          </a:bodyPr>
+          <a:lstStyle/>
+          <a:p>
+            <a:endParaRPr lang="en-IN" dirty="0"/>
           </a:p>
         </p:txBody>
       </p:sp>
